--- a/learning/P01_zephyr_make_project/slides/P004_CMSIS选择与下载_Windows.pptx
+++ b/learning/P01_zephyr_make_project/slides/P004_CMSIS选择与下载_Windows.pptx
@@ -35793,10 +35793,7 @@
                 </a:solidFill>
                 <a:ea typeface="Microsoft YaHei"/>
               </a:rPr>
-              <a:t>cd</a:t>
-            </a:r>
-            <a:r>
-              <a:t> </a:t>
+              <a:t xml:space="preserve">cd </a:t>
             </a:r>
             <a:r>
               <a:rPr>
@@ -35832,10 +35829,52 @@
                 </a:solidFill>
                 <a:ea typeface="Microsoft YaHei"/>
               </a:rPr>
-              <a:t>git</a:t>
-            </a:r>
-            <a:r>
-              <a:t> grep -n -w </a:t>
+              <a:t>grep</a:t>
+            </a:r>
+            <a:r>
+              <a:rPr>
+                <a:solidFill>
+                  <a:srgbClr val="29263B"/>
+                </a:solidFill>
+                <a:ea typeface="Microsoft YaHei"/>
+              </a:rPr>
+              <a:t xml:space="preserve"> </a:t>
+            </a:r>
+            <a:r>
+              <a:rPr>
+                <a:solidFill>
+                  <a:srgbClr val="B84E00"/>
+                </a:solidFill>
+                <a:ea typeface="Microsoft YaHei"/>
+              </a:rPr>
+              <a:t>-n</a:t>
+            </a:r>
+            <a:r>
+              <a:rPr>
+                <a:solidFill>
+                  <a:srgbClr val="29263B"/>
+                </a:solidFill>
+                <a:ea typeface="Microsoft YaHei"/>
+              </a:rPr>
+              <a:t xml:space="preserve"> </a:t>
+            </a:r>
+            <a:r>
+              <a:rPr>
+                <a:solidFill>
+                  <a:srgbClr val="B84E00"/>
+                </a:solidFill>
+                <a:ea typeface="Microsoft YaHei"/>
+              </a:rPr>
+              <a:t>-w</a:t>
+            </a:r>
+            <a:r>
+              <a:rPr>
+                <a:solidFill>
+                  <a:srgbClr val="29263B"/>
+                </a:solidFill>
+                <a:ea typeface="Microsoft YaHei"/>
+              </a:rPr>
+              <a:t xml:space="preserve"> </a:t>
             </a:r>
             <a:r>
               <a:rPr>
@@ -35847,7 +35886,13 @@
               <a:t>CONFIG_CPU_CORTEX_M</a:t>
             </a:r>
             <a:r>
-              <a:t> -- \</a:t>
+              <a:rPr>
+                <a:solidFill>
+                  <a:srgbClr val="29263B"/>
+                </a:solidFill>
+                <a:ea typeface="Microsoft YaHei"/>
+              </a:rPr>
+              <a:t xml:space="preserve"> -- \</a:t>
             </a:r>
           </a:p>
           <a:p>
@@ -35868,16 +35913,22 @@
               </a:defRPr>
             </a:pPr>
             <a:r>
-              <a:t>  '</a:t>
-            </a:r>
-            <a:r>
               <a:rPr>
                 <a:solidFill>
+                  <a:srgbClr val="29263B"/>
+                </a:solidFill>
+                <a:ea typeface="Microsoft YaHei"/>
+              </a:rPr>
+              <a:t xml:space="preserve">  </a:t>
+            </a:r>
+            <a:r>
+              <a:rPr>
+                <a:solidFill>
                   <a:srgbClr val="0070C0"/>
                 </a:solidFill>
                 <a:ea typeface="Microsoft YaHei"/>
               </a:rPr>
-              <a:t>modules/*/CMakeLists.txt'</a:t>
+              <a:t>modules/*/CMakeLists.txt</a:t>
             </a:r>
           </a:p>
         </p:txBody>
